--- a/classes/parte-14-grc-riesgo-y-cumplimiento/289-privacidad-y-proteccion-de-datos/clase-289-presentacion.pptx
+++ b/classes/parte-14-grc-riesgo-y-cumplimiento/289-privacidad-y-proteccion-de-datos/clase-289-presentacion.pptx
@@ -17,6 +17,10 @@
     <p:sldId id="265" r:id="rId16"/>
     <p:sldId id="266" r:id="rId17"/>
     <p:sldId id="267" r:id="rId18"/>
+    <p:sldId id="268" r:id="rId19"/>
+    <p:sldId id="269" r:id="rId20"/>
+    <p:sldId id="270" r:id="rId21"/>
+    <p:sldId id="271" r:id="rId22"/>
   </p:sldIdLst>
   <p:sldSz cx="9144000" cy="6858000" type="screen4x3"/>
   <p:notesSz cx="6858000" cy="9144000"/>
@@ -3198,7 +3202,7 @@
                   <a:srgbClr val="0B3D2E"/>
                 </a:solidFill>
               </a:rPr>
-              <a:t>⚠️ Errores comunes</a:t>
+              <a:t>🧪 Laboratorio guiado (ejercicio aplicado)</a:t>
             </a:r>
           </a:p>
         </p:txBody>
@@ -3236,67 +3240,97 @@
                   <a:srgbClr val="22282E"/>
                 </a:solidFill>
               </a:rPr>
-              <a:t>•  Confundir seguridad con privacidad — Cifrar no basta; hay que limitar finalidad y minimizar</a:t>
-            </a:r>
-          </a:p>
-          <a:p>
-            <a:pPr>
-              <a:spcAft>
-                <a:spcPts val="600"/>
-              </a:spcAft>
-            </a:pPr>
-            <a:r>
-              <a:rPr sz="1500">
-                <a:solidFill>
-                  <a:srgbClr val="22282E"/>
-                </a:solidFill>
-              </a:rPr>
-              <a:t>•  "Anonimizar" con un simple hash — Es seudonimización reversible; usa sal, k-anonimato o supresión</a:t>
-            </a:r>
-          </a:p>
-          <a:p>
-            <a:pPr>
-              <a:spcAft>
-                <a:spcPts val="600"/>
-              </a:spcAft>
-            </a:pPr>
-            <a:r>
-              <a:rPr sz="1500">
-                <a:solidFill>
-                  <a:srgbClr val="22282E"/>
-                </a:solidFill>
-              </a:rPr>
-              <a:t>•  Recoger "por si acaso" más datos de los necesarios — Viola minimización; recoge solo lo imprescindible</a:t>
-            </a:r>
-          </a:p>
-          <a:p>
-            <a:pPr>
-              <a:spcAft>
-                <a:spcPts val="600"/>
-              </a:spcAft>
-            </a:pPr>
-            <a:r>
-              <a:rPr sz="1500">
-                <a:solidFill>
-                  <a:srgbClr val="22282E"/>
-                </a:solidFill>
-              </a:rPr>
-              <a:t>•  DPIA hecha después de lanzar — Privacy by design exige hacerla antes; incorpórala al diseño</a:t>
-            </a:r>
-          </a:p>
-          <a:p>
-            <a:pPr>
-              <a:spcAft>
-                <a:spcPts val="600"/>
-              </a:spcAft>
-            </a:pPr>
-            <a:r>
-              <a:rPr sz="1500">
-                <a:solidFill>
-                  <a:srgbClr val="22282E"/>
-                </a:solidFill>
-              </a:rPr>
-              <a:t>•  Ignorar los plazos de derechos — GDPR da 1 mes; ten procedimientos listos</a:t>
+              <a:t>•  Parte A — DPIA de un nuevo tratamiento en "Ferretería del Sur S.A.":</a:t>
+            </a:r>
+          </a:p>
+          <a:p>
+            <a:pPr>
+              <a:spcAft>
+                <a:spcPts val="600"/>
+              </a:spcAft>
+            </a:pPr>
+            <a:r>
+              <a:rPr sz="1500">
+                <a:solidFill>
+                  <a:srgbClr val="22282E"/>
+                </a:solidFill>
+              </a:rPr>
+              <a:t>•  Escenario: la empresa quiere implantar recomendaciones personalizadas basadas en el historial de compras y la ubicación.</a:t>
+            </a:r>
+          </a:p>
+          <a:p>
+            <a:pPr>
+              <a:spcAft>
+                <a:spcPts val="600"/>
+              </a:spcAft>
+            </a:pPr>
+            <a:r>
+              <a:rPr sz="1500">
+                <a:solidFill>
+                  <a:srgbClr val="22282E"/>
+                </a:solidFill>
+              </a:rPr>
+              <a:t>•  Descripción del tratamiento: documenta finalidad, categorías de datos, base de licitud, destinatarios y plazos de conservación.</a:t>
+            </a:r>
+          </a:p>
+          <a:p>
+            <a:pPr>
+              <a:spcAft>
+                <a:spcPts val="600"/>
+              </a:spcAft>
+            </a:pPr>
+            <a:r>
+              <a:rPr sz="1500">
+                <a:solidFill>
+                  <a:srgbClr val="22282E"/>
+                </a:solidFill>
+              </a:rPr>
+              <a:t>•  Necesidad y proporcionalidad: justifica si el tratamiento es necesario y proporcionado, o si podrías lograr el fin con menos datos (minimización).</a:t>
+            </a:r>
+          </a:p>
+          <a:p>
+            <a:pPr>
+              <a:spcAft>
+                <a:spcPts val="600"/>
+              </a:spcAft>
+            </a:pPr>
+            <a:r>
+              <a:rPr sz="1500">
+                <a:solidFill>
+                  <a:srgbClr val="22282E"/>
+                </a:solidFill>
+              </a:rPr>
+              <a:t>•  Identificación de riesgos: lista 4 riesgos para los derechos de las personas (perfilado invasivo, reidentificación, brecha, uso secundario) con probabilidad e impacto.</a:t>
+            </a:r>
+          </a:p>
+          <a:p>
+            <a:pPr>
+              <a:spcAft>
+                <a:spcPts val="600"/>
+              </a:spcAft>
+            </a:pPr>
+            <a:r>
+              <a:rPr sz="1500">
+                <a:solidFill>
+                  <a:srgbClr val="22282E"/>
+                </a:solidFill>
+              </a:rPr>
+              <a:t>•  Medidas: define controles para cada riesgo (consentimiento granular, seudonimización, retención limitada, opción de exclusión).</a:t>
+            </a:r>
+          </a:p>
+          <a:p>
+            <a:pPr>
+              <a:spcAft>
+                <a:spcPts val="600"/>
+              </a:spcAft>
+            </a:pPr>
+            <a:r>
+              <a:rPr sz="1500">
+                <a:solidFill>
+                  <a:srgbClr val="22282E"/>
+                </a:solidFill>
+              </a:rPr>
+              <a:t>•  Conclusión: decide si el riesgo residual es aceptable o si debes consultar a la autoridad de control.</a:t>
             </a:r>
           </a:p>
         </p:txBody>
@@ -3347,7 +3381,7 @@
                   <a:srgbClr val="0B3D2E"/>
                 </a:solidFill>
               </a:rPr>
-              <a:t>❓ Preguntas frecuentes</a:t>
+              <a:t>✍️ Ejercicios</a:t>
             </a:r>
           </a:p>
         </p:txBody>
@@ -3385,97 +3419,82 @@
                   <a:srgbClr val="22282E"/>
                 </a:solidFill>
               </a:rPr>
-              <a:t>•  ❓ ¿Seguridad y privacidad no son lo mismo?</a:t>
-            </a:r>
-          </a:p>
-          <a:p>
-            <a:pPr>
-              <a:spcAft>
-                <a:spcPts val="600"/>
-              </a:spcAft>
-            </a:pPr>
-            <a:r>
-              <a:rPr sz="1500">
-                <a:solidFill>
-                  <a:srgbClr val="22282E"/>
-                </a:solidFill>
-              </a:rPr>
-              <a:t>•  No. La seguridad protege el dato de accesos no autorizados; la privacidad protege a la persona de usos indebidos, incluso por parte de quien tiene acceso legítimo. Se necesitan ambas.</a:t>
-            </a:r>
-          </a:p>
-          <a:p>
-            <a:pPr>
-              <a:spcAft>
-                <a:spcPts val="600"/>
-              </a:spcAft>
-            </a:pPr>
-            <a:r>
-              <a:rPr sz="1500">
-                <a:solidFill>
-                  <a:srgbClr val="22282E"/>
-                </a:solidFill>
-              </a:rPr>
-              <a:t>•  ❓ ¿Cuándo necesito un DPO?</a:t>
-            </a:r>
-          </a:p>
-          <a:p>
-            <a:pPr>
-              <a:spcAft>
-                <a:spcPts val="600"/>
-              </a:spcAft>
-            </a:pPr>
-            <a:r>
-              <a:rPr sz="1500">
-                <a:solidFill>
-                  <a:srgbClr val="22282E"/>
-                </a:solidFill>
-              </a:rPr>
-              <a:t>•  Cuando el tratamiento a gran escala de datos sensibles o la monitorización sistemática lo requieran (GDPR Art.37), o si eres autoridad pública. Muchas empresas lo designan por prudencia.</a:t>
-            </a:r>
-          </a:p>
-          <a:p>
-            <a:pPr>
-              <a:spcAft>
-                <a:spcPts val="600"/>
-              </a:spcAft>
-            </a:pPr>
-            <a:r>
-              <a:rPr sz="1500">
-                <a:solidFill>
-                  <a:srgbClr val="22282E"/>
-                </a:solidFill>
-              </a:rPr>
-              <a:t>•  ❓ ¿La anonimización saca los datos del GDPR?</a:t>
-            </a:r>
-          </a:p>
-          <a:p>
-            <a:pPr>
-              <a:spcAft>
-                <a:spcPts val="600"/>
-              </a:spcAft>
-            </a:pPr>
-            <a:r>
-              <a:rPr sz="1500">
-                <a:solidFill>
-                  <a:srgbClr val="22282E"/>
-                </a:solidFill>
-              </a:rPr>
-              <a:t>•  Sí, si es irreversible de verdad. Pero anonimizar bien es difícil; la seudonimización, en cambio, sigue siendo dato personal regulado.</a:t>
-            </a:r>
-          </a:p>
-          <a:p>
-            <a:pPr>
-              <a:spcAft>
-                <a:spcPts val="600"/>
-              </a:spcAft>
-            </a:pPr>
-            <a:r>
-              <a:rPr sz="1500">
-                <a:solidFill>
-                  <a:srgbClr val="22282E"/>
-                </a:solidFill>
-              </a:rPr>
-              <a:t>•  ❓ ¿Qué diferencia hay entre ISO 27701 y el NIST Privacy Framework?</a:t>
+              <a:t>•  Explica con un ejemplo la diferencia entre seguridad y privacidad.</a:t>
+            </a:r>
+          </a:p>
+          <a:p>
+            <a:pPr>
+              <a:spcAft>
+                <a:spcPts val="600"/>
+              </a:spcAft>
+            </a:pPr>
+            <a:r>
+              <a:rPr sz="1500">
+                <a:solidFill>
+                  <a:srgbClr val="22282E"/>
+                </a:solidFill>
+              </a:rPr>
+              <a:t>•  ¿Cuándo es obligatoria una DPIA? Da dos criterios del Art.35.</a:t>
+            </a:r>
+          </a:p>
+          <a:p>
+            <a:pPr>
+              <a:spcAft>
+                <a:spcPts val="600"/>
+              </a:spcAft>
+            </a:pPr>
+            <a:r>
+              <a:rPr sz="1500">
+                <a:solidFill>
+                  <a:srgbClr val="22282E"/>
+                </a:solidFill>
+              </a:rPr>
+              <a:t>•  Diferencia seudonimización de anonimización y su efecto legal.</a:t>
+            </a:r>
+          </a:p>
+          <a:p>
+            <a:pPr>
+              <a:spcAft>
+                <a:spcPts val="600"/>
+              </a:spcAft>
+            </a:pPr>
+            <a:r>
+              <a:rPr sz="1500">
+                <a:solidFill>
+                  <a:srgbClr val="22282E"/>
+                </a:solidFill>
+              </a:rPr>
+              <a:t>•  Diseña la configuración "by default" de una app de mensajería respetando la privacidad.</a:t>
+            </a:r>
+          </a:p>
+          <a:p>
+            <a:pPr>
+              <a:spcAft>
+                <a:spcPts val="600"/>
+              </a:spcAft>
+            </a:pPr>
+            <a:r>
+              <a:rPr sz="1500">
+                <a:solidFill>
+                  <a:srgbClr val="22282E"/>
+                </a:solidFill>
+              </a:rPr>
+              <a:t>•  ¿Por qué un hash sin sal no anonimiza un email? Propón la mejora.</a:t>
+            </a:r>
+          </a:p>
+          <a:p>
+            <a:pPr>
+              <a:spcAft>
+                <a:spcPts val="600"/>
+              </a:spcAft>
+            </a:pPr>
+            <a:r>
+              <a:rPr sz="1500">
+                <a:solidFill>
+                  <a:srgbClr val="22282E"/>
+                </a:solidFill>
+              </a:rPr>
+              <a:t>•  Enumera 4 derechos del interesado y el plazo para atenderlos.</a:t>
             </a:r>
           </a:p>
         </p:txBody>
@@ -3526,7 +3545,7 @@
                   <a:srgbClr val="0B3D2E"/>
                 </a:solidFill>
               </a:rPr>
-              <a:t>🔗 Referencias</a:t>
+              <a:t>📝 Reto verificable</a:t>
             </a:r>
           </a:p>
         </p:txBody>
@@ -3564,6 +3583,438 @@
                   <a:srgbClr val="22282E"/>
                 </a:solidFill>
               </a:rPr>
+              <a:t>•  Entrega una DPIA completa del tratamiento de recomendaciones personalizadas, con descripción, análisis de necesidad/proporcionalidad, identificación y evaluación de al menos 4 riesgos, medidas por…</a:t>
+            </a:r>
+          </a:p>
+          <a:p>
+            <a:pPr>
+              <a:spcAft>
+                <a:spcPts val="600"/>
+              </a:spcAft>
+            </a:pPr>
+            <a:r>
+              <a:rPr sz="1500">
+                <a:solidFill>
+                  <a:srgbClr val="22282E"/>
+                </a:solidFill>
+              </a:rPr>
+              <a:t>•  Criterio de aceptación: la DPIA justifica la minimización de datos, cada riesgo tiene una medida asociada, la conclusión indica si el riesgo residual es aceptable, y la demo distingue correctamente…</a:t>
+            </a:r>
+          </a:p>
+        </p:txBody>
+      </p:sp>
+    </p:spTree>
+  </p:cSld>
+  <p:clrMapOvr>
+    <a:masterClrMapping/>
+  </p:clrMapOvr>
+</p:sld>
+</file>
+
+<file path=ppt/slides/slide13.xml><?xml version="1.0" encoding="utf-8"?>
+<p:sld xmlns:a="http://schemas.openxmlformats.org/drawingml/2006/main" xmlns:p="http://schemas.openxmlformats.org/presentationml/2006/main" xmlns:r="http://schemas.openxmlformats.org/officeDocument/2006/relationships">
+  <p:cSld>
+    <p:spTree>
+      <p:nvGrpSpPr>
+        <p:cNvPr id="1" name=""/>
+        <p:cNvGrpSpPr/>
+        <p:nvPr/>
+      </p:nvGrpSpPr>
+      <p:grpSpPr/>
+      <p:sp>
+        <p:nvSpPr>
+          <p:cNvPr id="2" name="TextBox 1"/>
+          <p:cNvSpPr txBox="1"/>
+          <p:nvPr/>
+        </p:nvSpPr>
+        <p:spPr>
+          <a:xfrm>
+            <a:off x="457200" y="320040"/>
+            <a:ext cx="8229600" cy="822960"/>
+          </a:xfrm>
+          <a:prstGeom prst="rect">
+            <a:avLst/>
+          </a:prstGeom>
+          <a:noFill/>
+        </p:spPr>
+        <p:txBody>
+          <a:bodyPr wrap="square">
+            <a:spAutoFit/>
+          </a:bodyPr>
+          <a:lstStyle/>
+          <a:p>
+            <a:r>
+              <a:rPr sz="2600" b="1">
+                <a:solidFill>
+                  <a:srgbClr val="0B3D2E"/>
+                </a:solidFill>
+              </a:rPr>
+              <a:t>⚠️ Errores comunes</a:t>
+            </a:r>
+          </a:p>
+        </p:txBody>
+      </p:sp>
+      <p:sp>
+        <p:nvSpPr>
+          <p:cNvPr id="3" name="TextBox 2"/>
+          <p:cNvSpPr txBox="1"/>
+          <p:nvPr/>
+        </p:nvSpPr>
+        <p:spPr>
+          <a:xfrm>
+            <a:off x="457200" y="1280160"/>
+            <a:ext cx="8229600" cy="4937760"/>
+          </a:xfrm>
+          <a:prstGeom prst="rect">
+            <a:avLst/>
+          </a:prstGeom>
+          <a:noFill/>
+        </p:spPr>
+        <p:txBody>
+          <a:bodyPr wrap="square">
+            <a:spAutoFit/>
+          </a:bodyPr>
+          <a:lstStyle/>
+          <a:p>
+            <a:pPr>
+              <a:spcAft>
+                <a:spcPts val="600"/>
+              </a:spcAft>
+            </a:pPr>
+            <a:r>
+              <a:rPr sz="1500">
+                <a:solidFill>
+                  <a:srgbClr val="22282E"/>
+                </a:solidFill>
+              </a:rPr>
+              <a:t>•  Confundir seguridad con privacidad — Cifrar no basta; hay que limitar finalidad y minimizar</a:t>
+            </a:r>
+          </a:p>
+          <a:p>
+            <a:pPr>
+              <a:spcAft>
+                <a:spcPts val="600"/>
+              </a:spcAft>
+            </a:pPr>
+            <a:r>
+              <a:rPr sz="1500">
+                <a:solidFill>
+                  <a:srgbClr val="22282E"/>
+                </a:solidFill>
+              </a:rPr>
+              <a:t>•  "Anonimizar" con un simple hash — Es seudonimización reversible; usa sal, k-anonimato o supresión</a:t>
+            </a:r>
+          </a:p>
+          <a:p>
+            <a:pPr>
+              <a:spcAft>
+                <a:spcPts val="600"/>
+              </a:spcAft>
+            </a:pPr>
+            <a:r>
+              <a:rPr sz="1500">
+                <a:solidFill>
+                  <a:srgbClr val="22282E"/>
+                </a:solidFill>
+              </a:rPr>
+              <a:t>•  Recoger "por si acaso" más datos de los necesarios — Viola minimización; recoge solo lo imprescindible</a:t>
+            </a:r>
+          </a:p>
+          <a:p>
+            <a:pPr>
+              <a:spcAft>
+                <a:spcPts val="600"/>
+              </a:spcAft>
+            </a:pPr>
+            <a:r>
+              <a:rPr sz="1500">
+                <a:solidFill>
+                  <a:srgbClr val="22282E"/>
+                </a:solidFill>
+              </a:rPr>
+              <a:t>•  DPIA hecha después de lanzar — Privacy by design exige hacerla antes; incorpórala al diseño</a:t>
+            </a:r>
+          </a:p>
+          <a:p>
+            <a:pPr>
+              <a:spcAft>
+                <a:spcPts val="600"/>
+              </a:spcAft>
+            </a:pPr>
+            <a:r>
+              <a:rPr sz="1500">
+                <a:solidFill>
+                  <a:srgbClr val="22282E"/>
+                </a:solidFill>
+              </a:rPr>
+              <a:t>•  Ignorar los plazos de derechos — GDPR da 1 mes; ten procedimientos listos</a:t>
+            </a:r>
+          </a:p>
+        </p:txBody>
+      </p:sp>
+    </p:spTree>
+  </p:cSld>
+  <p:clrMapOvr>
+    <a:masterClrMapping/>
+  </p:clrMapOvr>
+</p:sld>
+</file>
+
+<file path=ppt/slides/slide14.xml><?xml version="1.0" encoding="utf-8"?>
+<p:sld xmlns:a="http://schemas.openxmlformats.org/drawingml/2006/main" xmlns:p="http://schemas.openxmlformats.org/presentationml/2006/main" xmlns:r="http://schemas.openxmlformats.org/officeDocument/2006/relationships">
+  <p:cSld>
+    <p:spTree>
+      <p:nvGrpSpPr>
+        <p:cNvPr id="1" name=""/>
+        <p:cNvGrpSpPr/>
+        <p:nvPr/>
+      </p:nvGrpSpPr>
+      <p:grpSpPr/>
+      <p:sp>
+        <p:nvSpPr>
+          <p:cNvPr id="2" name="TextBox 1"/>
+          <p:cNvSpPr txBox="1"/>
+          <p:nvPr/>
+        </p:nvSpPr>
+        <p:spPr>
+          <a:xfrm>
+            <a:off x="457200" y="320040"/>
+            <a:ext cx="8229600" cy="822960"/>
+          </a:xfrm>
+          <a:prstGeom prst="rect">
+            <a:avLst/>
+          </a:prstGeom>
+          <a:noFill/>
+        </p:spPr>
+        <p:txBody>
+          <a:bodyPr wrap="square">
+            <a:spAutoFit/>
+          </a:bodyPr>
+          <a:lstStyle/>
+          <a:p>
+            <a:r>
+              <a:rPr sz="2600" b="1">
+                <a:solidFill>
+                  <a:srgbClr val="0B3D2E"/>
+                </a:solidFill>
+              </a:rPr>
+              <a:t>❓ Preguntas frecuentes</a:t>
+            </a:r>
+          </a:p>
+        </p:txBody>
+      </p:sp>
+      <p:sp>
+        <p:nvSpPr>
+          <p:cNvPr id="3" name="TextBox 2"/>
+          <p:cNvSpPr txBox="1"/>
+          <p:nvPr/>
+        </p:nvSpPr>
+        <p:spPr>
+          <a:xfrm>
+            <a:off x="457200" y="1280160"/>
+            <a:ext cx="8229600" cy="4937760"/>
+          </a:xfrm>
+          <a:prstGeom prst="rect">
+            <a:avLst/>
+          </a:prstGeom>
+          <a:noFill/>
+        </p:spPr>
+        <p:txBody>
+          <a:bodyPr wrap="square">
+            <a:spAutoFit/>
+          </a:bodyPr>
+          <a:lstStyle/>
+          <a:p>
+            <a:pPr>
+              <a:spcAft>
+                <a:spcPts val="600"/>
+              </a:spcAft>
+            </a:pPr>
+            <a:r>
+              <a:rPr sz="1500">
+                <a:solidFill>
+                  <a:srgbClr val="22282E"/>
+                </a:solidFill>
+              </a:rPr>
+              <a:t>•  ❓ ¿Seguridad y privacidad no son lo mismo?</a:t>
+            </a:r>
+          </a:p>
+          <a:p>
+            <a:pPr>
+              <a:spcAft>
+                <a:spcPts val="600"/>
+              </a:spcAft>
+            </a:pPr>
+            <a:r>
+              <a:rPr sz="1500">
+                <a:solidFill>
+                  <a:srgbClr val="22282E"/>
+                </a:solidFill>
+              </a:rPr>
+              <a:t>•  No. La seguridad protege el dato de accesos no autorizados; la privacidad protege a la persona de usos indebidos, incluso por parte de quien tiene acceso legítimo. Se necesitan ambas.</a:t>
+            </a:r>
+          </a:p>
+          <a:p>
+            <a:pPr>
+              <a:spcAft>
+                <a:spcPts val="600"/>
+              </a:spcAft>
+            </a:pPr>
+            <a:r>
+              <a:rPr sz="1500">
+                <a:solidFill>
+                  <a:srgbClr val="22282E"/>
+                </a:solidFill>
+              </a:rPr>
+              <a:t>•  ❓ ¿Cuándo necesito un DPO?</a:t>
+            </a:r>
+          </a:p>
+          <a:p>
+            <a:pPr>
+              <a:spcAft>
+                <a:spcPts val="600"/>
+              </a:spcAft>
+            </a:pPr>
+            <a:r>
+              <a:rPr sz="1500">
+                <a:solidFill>
+                  <a:srgbClr val="22282E"/>
+                </a:solidFill>
+              </a:rPr>
+              <a:t>•  Cuando el tratamiento a gran escala de datos sensibles o la monitorización sistemática lo requieran (GDPR Art.37), o si eres autoridad pública. Muchas empresas lo designan por prudencia.</a:t>
+            </a:r>
+          </a:p>
+          <a:p>
+            <a:pPr>
+              <a:spcAft>
+                <a:spcPts val="600"/>
+              </a:spcAft>
+            </a:pPr>
+            <a:r>
+              <a:rPr sz="1500">
+                <a:solidFill>
+                  <a:srgbClr val="22282E"/>
+                </a:solidFill>
+              </a:rPr>
+              <a:t>•  ❓ ¿La anonimización saca los datos del GDPR?</a:t>
+            </a:r>
+          </a:p>
+          <a:p>
+            <a:pPr>
+              <a:spcAft>
+                <a:spcPts val="600"/>
+              </a:spcAft>
+            </a:pPr>
+            <a:r>
+              <a:rPr sz="1500">
+                <a:solidFill>
+                  <a:srgbClr val="22282E"/>
+                </a:solidFill>
+              </a:rPr>
+              <a:t>•  Sí, si es irreversible de verdad. Pero anonimizar bien es difícil; la seudonimización, en cambio, sigue siendo dato personal regulado.</a:t>
+            </a:r>
+          </a:p>
+          <a:p>
+            <a:pPr>
+              <a:spcAft>
+                <a:spcPts val="600"/>
+              </a:spcAft>
+            </a:pPr>
+            <a:r>
+              <a:rPr sz="1500">
+                <a:solidFill>
+                  <a:srgbClr val="22282E"/>
+                </a:solidFill>
+              </a:rPr>
+              <a:t>•  ❓ ¿Qué diferencia hay entre ISO 27701 y el NIST Privacy Framework?</a:t>
+            </a:r>
+          </a:p>
+        </p:txBody>
+      </p:sp>
+    </p:spTree>
+  </p:cSld>
+  <p:clrMapOvr>
+    <a:masterClrMapping/>
+  </p:clrMapOvr>
+</p:sld>
+</file>
+
+<file path=ppt/slides/slide15.xml><?xml version="1.0" encoding="utf-8"?>
+<p:sld xmlns:a="http://schemas.openxmlformats.org/drawingml/2006/main" xmlns:p="http://schemas.openxmlformats.org/presentationml/2006/main" xmlns:r="http://schemas.openxmlformats.org/officeDocument/2006/relationships">
+  <p:cSld>
+    <p:spTree>
+      <p:nvGrpSpPr>
+        <p:cNvPr id="1" name=""/>
+        <p:cNvGrpSpPr/>
+        <p:nvPr/>
+      </p:nvGrpSpPr>
+      <p:grpSpPr/>
+      <p:sp>
+        <p:nvSpPr>
+          <p:cNvPr id="2" name="TextBox 1"/>
+          <p:cNvSpPr txBox="1"/>
+          <p:nvPr/>
+        </p:nvSpPr>
+        <p:spPr>
+          <a:xfrm>
+            <a:off x="457200" y="320040"/>
+            <a:ext cx="8229600" cy="822960"/>
+          </a:xfrm>
+          <a:prstGeom prst="rect">
+            <a:avLst/>
+          </a:prstGeom>
+          <a:noFill/>
+        </p:spPr>
+        <p:txBody>
+          <a:bodyPr wrap="square">
+            <a:spAutoFit/>
+          </a:bodyPr>
+          <a:lstStyle/>
+          <a:p>
+            <a:r>
+              <a:rPr sz="2600" b="1">
+                <a:solidFill>
+                  <a:srgbClr val="0B3D2E"/>
+                </a:solidFill>
+              </a:rPr>
+              <a:t>🔗 Referencias</a:t>
+            </a:r>
+          </a:p>
+        </p:txBody>
+      </p:sp>
+      <p:sp>
+        <p:nvSpPr>
+          <p:cNvPr id="3" name="TextBox 2"/>
+          <p:cNvSpPr txBox="1"/>
+          <p:nvPr/>
+        </p:nvSpPr>
+        <p:spPr>
+          <a:xfrm>
+            <a:off x="457200" y="1280160"/>
+            <a:ext cx="8229600" cy="4937760"/>
+          </a:xfrm>
+          <a:prstGeom prst="rect">
+            <a:avLst/>
+          </a:prstGeom>
+          <a:noFill/>
+        </p:spPr>
+        <p:txBody>
+          <a:bodyPr wrap="square">
+            <a:spAutoFit/>
+          </a:bodyPr>
+          <a:lstStyle/>
+          <a:p>
+            <a:pPr>
+              <a:spcAft>
+                <a:spcPts val="600"/>
+              </a:spcAft>
+            </a:pPr>
+            <a:r>
+              <a:rPr sz="1500">
+                <a:solidFill>
+                  <a:srgbClr val="22282E"/>
+                </a:solidFill>
+              </a:rPr>
               <a:t>•  GDPR — Reglamento (UE) 2016/679, arts. 5, 25, 32, 35. &lt;https://eur-lex.europa.eu/eli/reg/2016/679/oj&gt;</a:t>
             </a:r>
           </a:p>
@@ -3629,6 +4080,81 @@
           </a:p>
         </p:txBody>
       </p:sp>
+    </p:spTree>
+  </p:cSld>
+  <p:clrMapOvr>
+    <a:masterClrMapping/>
+  </p:clrMapOvr>
+</p:sld>
+</file>
+
+<file path=ppt/slides/slide16.xml><?xml version="1.0" encoding="utf-8"?>
+<p:sld xmlns:a="http://schemas.openxmlformats.org/drawingml/2006/main" xmlns:p="http://schemas.openxmlformats.org/presentationml/2006/main" xmlns:r="http://schemas.openxmlformats.org/officeDocument/2006/relationships">
+  <p:cSld>
+    <p:spTree>
+      <p:nvGrpSpPr>
+        <p:cNvPr id="1" name=""/>
+        <p:cNvGrpSpPr/>
+        <p:nvPr/>
+      </p:nvGrpSpPr>
+      <p:grpSpPr/>
+      <p:sp>
+        <p:nvSpPr>
+          <p:cNvPr id="2" name="TextBox 1"/>
+          <p:cNvSpPr txBox="1"/>
+          <p:nvPr/>
+        </p:nvSpPr>
+        <p:spPr>
+          <a:xfrm>
+            <a:off x="457200" y="274320"/>
+            <a:ext cx="8229600" cy="640080"/>
+          </a:xfrm>
+          <a:prstGeom prst="rect">
+            <a:avLst/>
+          </a:prstGeom>
+          <a:noFill/>
+        </p:spPr>
+        <p:txBody>
+          <a:bodyPr wrap="square">
+            <a:spAutoFit/>
+          </a:bodyPr>
+          <a:lstStyle/>
+          <a:p>
+            <a:r>
+              <a:rPr sz="2200" b="1">
+                <a:solidFill>
+                  <a:srgbClr val="0B3D2E"/>
+                </a:solidFill>
+              </a:rPr>
+              <a:t>Diagrama de la clase</a:t>
+            </a:r>
+          </a:p>
+        </p:txBody>
+      </p:sp>
+      <p:pic>
+        <p:nvPicPr>
+          <p:cNvPr id="3" name="Picture 2" descr="0b26f14b6fdf8168.png"/>
+          <p:cNvPicPr>
+            <a:picLocks noChangeAspect="1"/>
+          </p:cNvPicPr>
+          <p:nvPr/>
+        </p:nvPicPr>
+        <p:blipFill>
+          <a:blip r:embed="rId2"/>
+          <a:stretch>
+            <a:fillRect/>
+          </a:stretch>
+        </p:blipFill>
+        <p:spPr>
+          <a:xfrm>
+            <a:off x="457200" y="3479292"/>
+            <a:ext cx="8229600" cy="539496"/>
+          </a:xfrm>
+          <a:prstGeom prst="rect">
+            <a:avLst/>
+          </a:prstGeom>
+        </p:spPr>
+      </p:pic>
     </p:spTree>
   </p:cSld>
   <p:clrMapOvr>
@@ -3713,7 +4239,7 @@
                   <a:srgbClr val="22282E"/>
                 </a:solidFill>
               </a:rPr>
-              <a:t>•  Profundizar en la privacidad como disciplina propia, más allá del cumplimiento legal de la clase 281. Al terminar entenderás los principios de privacy by design, la diferencia entre seguridad y privacidad, cómo ejecutar una Evaluación de Impacto de Protección de Datos (DPIA/EIPD), aplicar técnicas de minimización, seudonimización y anonimización, y el papel del DPO (Delegado de Protección de Datos).</a:t>
+              <a:t>•  Profundizar en la privacidad como disciplina propia, más allá del cumplimiento legal de la clase 281. Al terminar entenderás los principios de privacy by design, la diferencia entre seguridad y…</a:t>
             </a:r>
           </a:p>
         </p:txBody>
@@ -4107,7 +4633,7 @@
                   <a:srgbClr val="0B3D2E"/>
                 </a:solidFill>
               </a:rPr>
-              <a:t>📖 Definiciones y características</a:t>
+              <a:t>🧠 Explicación en profundidad</a:t>
             </a:r>
           </a:p>
         </p:txBody>
@@ -4145,97 +4671,22 @@
                   <a:srgbClr val="22282E"/>
                 </a:solidFill>
               </a:rPr>
-              <a:t>•  Privacidad: derecho de las personas a controlar sus datos personales. Clave: protege a la persona, no solo al dato.</a:t>
-            </a:r>
-          </a:p>
-          <a:p>
-            <a:pPr>
-              <a:spcAft>
-                <a:spcPts val="600"/>
-              </a:spcAft>
-            </a:pPr>
-            <a:r>
-              <a:rPr sz="1500">
-                <a:solidFill>
-                  <a:srgbClr val="22282E"/>
-                </a:solidFill>
-              </a:rPr>
-              <a:t>•  Privacy by design: incorporar la privacidad desde el diseño del sistema. Clave: proactivo, no reactivo.</a:t>
-            </a:r>
-          </a:p>
-          <a:p>
-            <a:pPr>
-              <a:spcAft>
-                <a:spcPts val="600"/>
-              </a:spcAft>
-            </a:pPr>
-            <a:r>
-              <a:rPr sz="1500">
-                <a:solidFill>
-                  <a:srgbClr val="22282E"/>
-                </a:solidFill>
-              </a:rPr>
-              <a:t>•  Privacy by default: la configuración más protectora es la predeterminada. Clave: el usuario no debe "activar" su privacidad.</a:t>
-            </a:r>
-          </a:p>
-          <a:p>
-            <a:pPr>
-              <a:spcAft>
-                <a:spcPts val="600"/>
-              </a:spcAft>
-            </a:pPr>
-            <a:r>
-              <a:rPr sz="1500">
-                <a:solidFill>
-                  <a:srgbClr val="22282E"/>
-                </a:solidFill>
-              </a:rPr>
-              <a:t>•  DPIA/EIPD: evaluación del impacto de un tratamiento sobre los derechos y libertades. Clave: obligatoria en tratamientos de alto riesgo (GDPR Art.35).</a:t>
-            </a:r>
-          </a:p>
-          <a:p>
-            <a:pPr>
-              <a:spcAft>
-                <a:spcPts val="600"/>
-              </a:spcAft>
-            </a:pPr>
-            <a:r>
-              <a:rPr sz="1500">
-                <a:solidFill>
-                  <a:srgbClr val="22282E"/>
-                </a:solidFill>
-              </a:rPr>
-              <a:t>•  Seudonimización: sustituir identificadores de forma reversible con clave separada. Clave: sigue siendo dato personal.</a:t>
-            </a:r>
-          </a:p>
-          <a:p>
-            <a:pPr>
-              <a:spcAft>
-                <a:spcPts val="600"/>
-              </a:spcAft>
-            </a:pPr>
-            <a:r>
-              <a:rPr sz="1500">
-                <a:solidFill>
-                  <a:srgbClr val="22282E"/>
-                </a:solidFill>
-              </a:rPr>
-              <a:t>•  Anonimización: hacer imposible la reidentificación. Clave: deja de ser dato personal (fuera de GDPR) si es irreversible.</a:t>
-            </a:r>
-          </a:p>
-          <a:p>
-            <a:pPr>
-              <a:spcAft>
-                <a:spcPts val="600"/>
-              </a:spcAft>
-            </a:pPr>
-            <a:r>
-              <a:rPr sz="1500">
-                <a:solidFill>
-                  <a:srgbClr val="22282E"/>
-                </a:solidFill>
-              </a:rPr>
-              <a:t>•  DPO (Delegado de Protección de Datos): figura independiente que supervisa el cumplimiento. Clave: obligatorio en ciertos casos (Art.37).</a:t>
+              <a:t>•  Privacidad gobierna efectos del tratamiento sobre personas; seguridad protege propiedades de información. El ciclo documenta propósito, base, minimización, acceso, retención, terceros y derechos.…</a:t>
+            </a:r>
+          </a:p>
+          <a:p>
+            <a:pPr>
+              <a:spcAft>
+                <a:spcPts val="600"/>
+              </a:spcAft>
+            </a:pPr>
+            <a:r>
+              <a:rPr sz="1500">
+                <a:solidFill>
+                  <a:srgbClr val="22282E"/>
+                </a:solidFill>
+              </a:rPr>
+              <a:t>•  Un dataset elimina nombres pero conserva ubicación precisa y horarios. La reidentificación sigue plausible; se reduce granularidad y acceso según propósito.</a:t>
             </a:r>
           </a:p>
         </p:txBody>
@@ -4286,7 +4737,7 @@
                   <a:srgbClr val="0B3D2E"/>
                 </a:solidFill>
               </a:rPr>
-              <a:t>🧰 Herramientas y preparación</a:t>
+              <a:t>📔 Glosario operativo</a:t>
             </a:r>
           </a:p>
         </p:txBody>
@@ -4324,52 +4775,52 @@
                   <a:srgbClr val="22282E"/>
                 </a:solidFill>
               </a:rPr>
-              <a:t>•  Texto del GDPR (arts. 5, 25, 32, 35) y guías de la AEPD/EDPB sobre DPIA.</a:t>
-            </a:r>
-          </a:p>
-          <a:p>
-            <a:pPr>
-              <a:spcAft>
-                <a:spcPts val="600"/>
-              </a:spcAft>
-            </a:pPr>
-            <a:r>
-              <a:rPr sz="1500">
-                <a:solidFill>
-                  <a:srgbClr val="22282E"/>
-                </a:solidFill>
-              </a:rPr>
-              <a:t>•  Referencia de marcos: ISO/IEC 27701 (PIMS) y NIST Privacy Framework 1.0.</a:t>
-            </a:r>
-          </a:p>
-          <a:p>
-            <a:pPr>
-              <a:spcAft>
-                <a:spcPts val="600"/>
-              </a:spcAft>
-            </a:pPr>
-            <a:r>
-              <a:rPr sz="1500">
-                <a:solidFill>
-                  <a:srgbClr val="22282E"/>
-                </a:solidFill>
-              </a:rPr>
-              <a:t>•  Una plantilla de DPIA (la AEPD y el ICO publican plantillas gratuitas).</a:t>
-            </a:r>
-          </a:p>
-          <a:p>
-            <a:pPr>
-              <a:spcAft>
-                <a:spcPts val="600"/>
-              </a:spcAft>
-            </a:pPr>
-            <a:r>
-              <a:rPr sz="1500">
-                <a:solidFill>
-                  <a:srgbClr val="22282E"/>
-                </a:solidFill>
-              </a:rPr>
-              <a:t>•  Para el laboratorio técnico: un pequeño dataset de ejemplo y Python con pandas para practicar seudonimización/anonimización.</a:t>
+              <a:t>•  Término — Definición</a:t>
+            </a:r>
+          </a:p>
+          <a:p>
+            <a:pPr>
+              <a:spcAft>
+                <a:spcPts val="600"/>
+              </a:spcAft>
+            </a:pPr>
+            <a:r>
+              <a:rPr sz="1500">
+                <a:solidFill>
+                  <a:srgbClr val="22282E"/>
+                </a:solidFill>
+              </a:rPr>
+              <a:t>•  Minimización — Limitar datos a lo necesario para propósito.</a:t>
+            </a:r>
+          </a:p>
+          <a:p>
+            <a:pPr>
+              <a:spcAft>
+                <a:spcPts val="600"/>
+              </a:spcAft>
+            </a:pPr>
+            <a:r>
+              <a:rPr sz="1500">
+                <a:solidFill>
+                  <a:srgbClr val="22282E"/>
+                </a:solidFill>
+              </a:rPr>
+              <a:t>•  Seudonimización — Separar identificadores sin eliminar toda posibilidad de enlace.</a:t>
+            </a:r>
+          </a:p>
+          <a:p>
+            <a:pPr>
+              <a:spcAft>
+                <a:spcPts val="600"/>
+              </a:spcAft>
+            </a:pPr>
+            <a:r>
+              <a:rPr sz="1500">
+                <a:solidFill>
+                  <a:srgbClr val="22282E"/>
+                </a:solidFill>
+              </a:rPr>
+              <a:t>•  DPIA — Evaluación estructurada de impacto de privacidad según aplicabilidad.</a:t>
             </a:r>
           </a:p>
         </p:txBody>
@@ -4420,7 +4871,7 @@
                   <a:srgbClr val="0B3D2E"/>
                 </a:solidFill>
               </a:rPr>
-              <a:t>🧪 Laboratorio guiado (ejercicio aplicado)</a:t>
+              <a:t>✅ Criterio de dominio</a:t>
             </a:r>
           </a:p>
         </p:txBody>
@@ -4458,97 +4909,7 @@
                   <a:srgbClr val="22282E"/>
                 </a:solidFill>
               </a:rPr>
-              <a:t>•  Parte A — DPIA de un nuevo tratamiento en "Ferretería del Sur S.A.":</a:t>
-            </a:r>
-          </a:p>
-          <a:p>
-            <a:pPr>
-              <a:spcAft>
-                <a:spcPts val="600"/>
-              </a:spcAft>
-            </a:pPr>
-            <a:r>
-              <a:rPr sz="1500">
-                <a:solidFill>
-                  <a:srgbClr val="22282E"/>
-                </a:solidFill>
-              </a:rPr>
-              <a:t>•  Escenario: la empresa quiere implantar recomendaciones personalizadas basadas en el historial de compras y la ubicación.</a:t>
-            </a:r>
-          </a:p>
-          <a:p>
-            <a:pPr>
-              <a:spcAft>
-                <a:spcPts val="600"/>
-              </a:spcAft>
-            </a:pPr>
-            <a:r>
-              <a:rPr sz="1500">
-                <a:solidFill>
-                  <a:srgbClr val="22282E"/>
-                </a:solidFill>
-              </a:rPr>
-              <a:t>•  Descripción del tratamiento: documenta finalidad, categorías de datos, base de licitud, destinatarios y plazos de conservación.</a:t>
-            </a:r>
-          </a:p>
-          <a:p>
-            <a:pPr>
-              <a:spcAft>
-                <a:spcPts val="600"/>
-              </a:spcAft>
-            </a:pPr>
-            <a:r>
-              <a:rPr sz="1500">
-                <a:solidFill>
-                  <a:srgbClr val="22282E"/>
-                </a:solidFill>
-              </a:rPr>
-              <a:t>•  Necesidad y proporcionalidad: justifica si el tratamiento es necesario y proporcionado, o si podrías lograr el fin con menos datos (minimización).</a:t>
-            </a:r>
-          </a:p>
-          <a:p>
-            <a:pPr>
-              <a:spcAft>
-                <a:spcPts val="600"/>
-              </a:spcAft>
-            </a:pPr>
-            <a:r>
-              <a:rPr sz="1500">
-                <a:solidFill>
-                  <a:srgbClr val="22282E"/>
-                </a:solidFill>
-              </a:rPr>
-              <a:t>•  Identificación de riesgos: lista 4 riesgos para los derechos de las personas (perfilado invasivo, reidentificación, brecha, uso secundario) con probabilidad e impacto.</a:t>
-            </a:r>
-          </a:p>
-          <a:p>
-            <a:pPr>
-              <a:spcAft>
-                <a:spcPts val="600"/>
-              </a:spcAft>
-            </a:pPr>
-            <a:r>
-              <a:rPr sz="1500">
-                <a:solidFill>
-                  <a:srgbClr val="22282E"/>
-                </a:solidFill>
-              </a:rPr>
-              <a:t>•  Medidas: define controles para cada riesgo (consentimiento granular, seudonimización, retención limitada, opción de exclusión).</a:t>
-            </a:r>
-          </a:p>
-          <a:p>
-            <a:pPr>
-              <a:spcAft>
-                <a:spcPts val="600"/>
-              </a:spcAft>
-            </a:pPr>
-            <a:r>
-              <a:rPr sz="1500">
-                <a:solidFill>
-                  <a:srgbClr val="22282E"/>
-                </a:solidFill>
-              </a:rPr>
-              <a:t>•  Conclusión: decide si el riesgo residual es aceptable o si debes consultar a la autoridad de control.</a:t>
+              <a:t>•  El alumno mapea un flujo, justifica propósito y retención y diferencia seguridad, seudonimización y anonimización.</a:t>
             </a:r>
           </a:p>
         </p:txBody>
@@ -4599,7 +4960,7 @@
                   <a:srgbClr val="0B3D2E"/>
                 </a:solidFill>
               </a:rPr>
-              <a:t>✍️ Ejercicios</a:t>
+              <a:t>📖 Definiciones y características</a:t>
             </a:r>
           </a:p>
         </p:txBody>
@@ -4637,82 +4998,97 @@
                   <a:srgbClr val="22282E"/>
                 </a:solidFill>
               </a:rPr>
-              <a:t>•  Explica con un ejemplo la diferencia entre seguridad y privacidad.</a:t>
-            </a:r>
-          </a:p>
-          <a:p>
-            <a:pPr>
-              <a:spcAft>
-                <a:spcPts val="600"/>
-              </a:spcAft>
-            </a:pPr>
-            <a:r>
-              <a:rPr sz="1500">
-                <a:solidFill>
-                  <a:srgbClr val="22282E"/>
-                </a:solidFill>
-              </a:rPr>
-              <a:t>•  ¿Cuándo es obligatoria una DPIA? Da dos criterios del Art.35.</a:t>
-            </a:r>
-          </a:p>
-          <a:p>
-            <a:pPr>
-              <a:spcAft>
-                <a:spcPts val="600"/>
-              </a:spcAft>
-            </a:pPr>
-            <a:r>
-              <a:rPr sz="1500">
-                <a:solidFill>
-                  <a:srgbClr val="22282E"/>
-                </a:solidFill>
-              </a:rPr>
-              <a:t>•  Diferencia seudonimización de anonimización y su efecto legal.</a:t>
-            </a:r>
-          </a:p>
-          <a:p>
-            <a:pPr>
-              <a:spcAft>
-                <a:spcPts val="600"/>
-              </a:spcAft>
-            </a:pPr>
-            <a:r>
-              <a:rPr sz="1500">
-                <a:solidFill>
-                  <a:srgbClr val="22282E"/>
-                </a:solidFill>
-              </a:rPr>
-              <a:t>•  Diseña la configuración "by default" de una app de mensajería respetando la privacidad.</a:t>
-            </a:r>
-          </a:p>
-          <a:p>
-            <a:pPr>
-              <a:spcAft>
-                <a:spcPts val="600"/>
-              </a:spcAft>
-            </a:pPr>
-            <a:r>
-              <a:rPr sz="1500">
-                <a:solidFill>
-                  <a:srgbClr val="22282E"/>
-                </a:solidFill>
-              </a:rPr>
-              <a:t>•  ¿Por qué un hash sin sal no anonimiza un email? Propón la mejora.</a:t>
-            </a:r>
-          </a:p>
-          <a:p>
-            <a:pPr>
-              <a:spcAft>
-                <a:spcPts val="600"/>
-              </a:spcAft>
-            </a:pPr>
-            <a:r>
-              <a:rPr sz="1500">
-                <a:solidFill>
-                  <a:srgbClr val="22282E"/>
-                </a:solidFill>
-              </a:rPr>
-              <a:t>•  Enumera 4 derechos del interesado y el plazo para atenderlos.</a:t>
+              <a:t>•  Privacidad: derecho de las personas a controlar sus datos personales. Clave: protege a la persona, no solo al dato.</a:t>
+            </a:r>
+          </a:p>
+          <a:p>
+            <a:pPr>
+              <a:spcAft>
+                <a:spcPts val="600"/>
+              </a:spcAft>
+            </a:pPr>
+            <a:r>
+              <a:rPr sz="1500">
+                <a:solidFill>
+                  <a:srgbClr val="22282E"/>
+                </a:solidFill>
+              </a:rPr>
+              <a:t>•  Privacy by design: incorporar la privacidad desde el diseño del sistema. Clave: proactivo, no reactivo.</a:t>
+            </a:r>
+          </a:p>
+          <a:p>
+            <a:pPr>
+              <a:spcAft>
+                <a:spcPts val="600"/>
+              </a:spcAft>
+            </a:pPr>
+            <a:r>
+              <a:rPr sz="1500">
+                <a:solidFill>
+                  <a:srgbClr val="22282E"/>
+                </a:solidFill>
+              </a:rPr>
+              <a:t>•  Privacy by default: la configuración más protectora es la predeterminada. Clave: el usuario no debe "activar" su privacidad.</a:t>
+            </a:r>
+          </a:p>
+          <a:p>
+            <a:pPr>
+              <a:spcAft>
+                <a:spcPts val="600"/>
+              </a:spcAft>
+            </a:pPr>
+            <a:r>
+              <a:rPr sz="1500">
+                <a:solidFill>
+                  <a:srgbClr val="22282E"/>
+                </a:solidFill>
+              </a:rPr>
+              <a:t>•  DPIA/EIPD: evaluación del impacto de un tratamiento sobre los derechos y libertades. Clave: obligatoria en tratamientos de alto riesgo (GDPR Art.35).</a:t>
+            </a:r>
+          </a:p>
+          <a:p>
+            <a:pPr>
+              <a:spcAft>
+                <a:spcPts val="600"/>
+              </a:spcAft>
+            </a:pPr>
+            <a:r>
+              <a:rPr sz="1500">
+                <a:solidFill>
+                  <a:srgbClr val="22282E"/>
+                </a:solidFill>
+              </a:rPr>
+              <a:t>•  Seudonimización: sustituir identificadores de forma reversible con clave separada. Clave: sigue siendo dato personal.</a:t>
+            </a:r>
+          </a:p>
+          <a:p>
+            <a:pPr>
+              <a:spcAft>
+                <a:spcPts val="600"/>
+              </a:spcAft>
+            </a:pPr>
+            <a:r>
+              <a:rPr sz="1500">
+                <a:solidFill>
+                  <a:srgbClr val="22282E"/>
+                </a:solidFill>
+              </a:rPr>
+              <a:t>•  Anonimización: hacer imposible la reidentificación. Clave: deja de ser dato personal (fuera de GDPR) si es irreversible.</a:t>
+            </a:r>
+          </a:p>
+          <a:p>
+            <a:pPr>
+              <a:spcAft>
+                <a:spcPts val="600"/>
+              </a:spcAft>
+            </a:pPr>
+            <a:r>
+              <a:rPr sz="1500">
+                <a:solidFill>
+                  <a:srgbClr val="22282E"/>
+                </a:solidFill>
+              </a:rPr>
+              <a:t>•  DPO (Delegado de Protección de Datos): figura independiente que supervisa el cumplimiento. Clave: obligatorio en ciertos casos (Art.37).</a:t>
             </a:r>
           </a:p>
         </p:txBody>
@@ -4763,7 +5139,7 @@
                   <a:srgbClr val="0B3D2E"/>
                 </a:solidFill>
               </a:rPr>
-              <a:t>📝 Reto verificable</a:t>
+              <a:t>🧰 Herramientas y preparación</a:t>
             </a:r>
           </a:p>
         </p:txBody>
@@ -4801,22 +5177,52 @@
                   <a:srgbClr val="22282E"/>
                 </a:solidFill>
               </a:rPr>
-              <a:t>•  Entrega una DPIA completa del tratamiento de recomendaciones personalizadas, con descripción, análisis de necesidad/proporcionalidad, identificación y evaluación de al menos 4 riesgos, medidas por riesgo y conclusión sobre el riesgo residual, más una demostración técnica de seudonimización y minimización sobre un dataset.</a:t>
-            </a:r>
-          </a:p>
-          <a:p>
-            <a:pPr>
-              <a:spcAft>
-                <a:spcPts val="600"/>
-              </a:spcAft>
-            </a:pPr>
-            <a:r>
-              <a:rPr sz="1500">
-                <a:solidFill>
-                  <a:srgbClr val="22282E"/>
-                </a:solidFill>
-              </a:rPr>
-              <a:t>•  Criterio de aceptación: la DPIA justifica la minimización de datos, cada riesgo tiene una medida asociada, la conclusión indica si el riesgo residual es aceptable, y la demo distingue correctamente seudonimización de anonimización.</a:t>
+              <a:t>•  Texto del GDPR (arts. 5, 25, 32, 35) y guías de la AEPD/EDPB sobre DPIA.</a:t>
+            </a:r>
+          </a:p>
+          <a:p>
+            <a:pPr>
+              <a:spcAft>
+                <a:spcPts val="600"/>
+              </a:spcAft>
+            </a:pPr>
+            <a:r>
+              <a:rPr sz="1500">
+                <a:solidFill>
+                  <a:srgbClr val="22282E"/>
+                </a:solidFill>
+              </a:rPr>
+              <a:t>•  Referencia de marcos: ISO/IEC 27701 (PIMS) y NIST Privacy Framework 1.0.</a:t>
+            </a:r>
+          </a:p>
+          <a:p>
+            <a:pPr>
+              <a:spcAft>
+                <a:spcPts val="600"/>
+              </a:spcAft>
+            </a:pPr>
+            <a:r>
+              <a:rPr sz="1500">
+                <a:solidFill>
+                  <a:srgbClr val="22282E"/>
+                </a:solidFill>
+              </a:rPr>
+              <a:t>•  Una plantilla de DPIA (la AEPD y el ICO publican plantillas gratuitas).</a:t>
+            </a:r>
+          </a:p>
+          <a:p>
+            <a:pPr>
+              <a:spcAft>
+                <a:spcPts val="600"/>
+              </a:spcAft>
+            </a:pPr>
+            <a:r>
+              <a:rPr sz="1500">
+                <a:solidFill>
+                  <a:srgbClr val="22282E"/>
+                </a:solidFill>
+              </a:rPr>
+              <a:t>•  Para el laboratorio técnico: un pequeño dataset de ejemplo y Python con pandas para practicar seudonimización/anonimización.</a:t>
             </a:r>
           </a:p>
         </p:txBody>
